--- a/PPTX_Files_Judging/2EXQExL.pptx
+++ b/PPTX_Files_Judging/2EXQExL.pptx
@@ -238,7 +238,7 @@
           <a:p>
             <a:fld id="{7542C63C-1BED-D14F-BEB3-0E8C23045CEB}" type="datetimeFigureOut">
               <a:rPr lang="en-US" smtClean="0"/>
-              <a:t>4/24/25</a:t>
+              <a:t>5/3/25</a:t>
             </a:fld>
             <a:endParaRPr lang="en-US"/>
           </a:p>
@@ -789,7 +789,7 @@
               <a:pPr>
                 <a:defRPr/>
               </a:pPr>
-              <a:t>4/24/25</a:t>
+              <a:t>5/3/25</a:t>
             </a:fld>
             <a:endParaRPr lang="en-US" altLang="en-US"/>
           </a:p>
@@ -997,7 +997,7 @@
               <a:pPr>
                 <a:defRPr/>
               </a:pPr>
-              <a:t>4/24/25</a:t>
+              <a:t>5/3/25</a:t>
             </a:fld>
             <a:endParaRPr lang="en-US" altLang="en-US"/>
           </a:p>
@@ -1215,7 +1215,7 @@
               <a:pPr>
                 <a:defRPr/>
               </a:pPr>
-              <a:t>4/24/25</a:t>
+              <a:t>5/3/25</a:t>
             </a:fld>
             <a:endParaRPr lang="en-US" altLang="en-US"/>
           </a:p>
@@ -1423,7 +1423,7 @@
               <a:pPr>
                 <a:defRPr/>
               </a:pPr>
-              <a:t>4/24/25</a:t>
+              <a:t>5/3/25</a:t>
             </a:fld>
             <a:endParaRPr lang="en-US" altLang="en-US"/>
           </a:p>
@@ -1708,7 +1708,7 @@
               <a:pPr>
                 <a:defRPr/>
               </a:pPr>
-              <a:t>4/24/25</a:t>
+              <a:t>5/3/25</a:t>
             </a:fld>
             <a:endParaRPr lang="en-US" altLang="en-US"/>
           </a:p>
@@ -2033,7 +2033,7 @@
               <a:pPr>
                 <a:defRPr/>
               </a:pPr>
-              <a:t>4/24/25</a:t>
+              <a:t>5/3/25</a:t>
             </a:fld>
             <a:endParaRPr lang="en-US" altLang="en-US"/>
           </a:p>
@@ -2497,7 +2497,7 @@
               <a:pPr>
                 <a:defRPr/>
               </a:pPr>
-              <a:t>4/24/25</a:t>
+              <a:t>5/3/25</a:t>
             </a:fld>
             <a:endParaRPr lang="en-US" altLang="en-US"/>
           </a:p>
@@ -2654,7 +2654,7 @@
               <a:pPr>
                 <a:defRPr/>
               </a:pPr>
-              <a:t>4/24/25</a:t>
+              <a:t>5/3/25</a:t>
             </a:fld>
             <a:endParaRPr lang="en-US" altLang="en-US"/>
           </a:p>
@@ -2789,7 +2789,7 @@
               <a:pPr>
                 <a:defRPr/>
               </a:pPr>
-              <a:t>4/24/25</a:t>
+              <a:t>5/3/25</a:t>
             </a:fld>
             <a:endParaRPr lang="en-US" altLang="en-US"/>
           </a:p>
@@ -3104,7 +3104,7 @@
               <a:pPr>
                 <a:defRPr/>
               </a:pPr>
-              <a:t>4/24/25</a:t>
+              <a:t>5/3/25</a:t>
             </a:fld>
             <a:endParaRPr lang="en-US" altLang="en-US"/>
           </a:p>
@@ -3399,7 +3399,7 @@
               <a:pPr>
                 <a:defRPr/>
               </a:pPr>
-              <a:t>4/24/25</a:t>
+              <a:t>5/3/25</a:t>
             </a:fld>
             <a:endParaRPr lang="en-US" altLang="en-US"/>
           </a:p>
@@ -3716,7 +3716,7 @@
               <a:pPr>
                 <a:defRPr/>
               </a:pPr>
-              <a:t>4/24/25</a:t>
+              <a:t>5/3/25</a:t>
             </a:fld>
             <a:endParaRPr lang="en-US" altLang="en-US"/>
           </a:p>
@@ -8883,6 +8883,30 @@
           </a:p>
         </p:txBody>
       </p:sp>
+      <p:pic>
+        <p:nvPicPr>
+          <p:cNvPr id="2104" name="Picture 2103" descr="62C.png"/>
+          <p:cNvPicPr>
+            <a:picLocks noChangeAspect="1"/>
+          </p:cNvPicPr>
+          <p:nvPr/>
+        </p:nvPicPr>
+        <p:blipFill>
+          <a:blip r:embed="rId12"/>
+          <a:stretch>
+            <a:fillRect/>
+          </a:stretch>
+        </p:blipFill>
+        <p:spPr>
+          <a:xfrm>
+            <a:off x="28053931" y="505518"/>
+            <a:ext cx="2103120" cy="3108960"/>
+          </a:xfrm>
+          <a:prstGeom prst="rect">
+            <a:avLst/>
+          </a:prstGeom>
+        </p:spPr>
+      </p:pic>
     </p:spTree>
   </p:cSld>
   <p:clrMapOvr>
